--- a/Foundation_F1/F1-L12_Review_Assessment.pptx
+++ b/Foundation_F1/F1-L12_Review_Assessment.pptx
@@ -972,7 +972,11 @@
           <a:lstStyle/>
           <a:p>
             <a:r>
-              <a:rPr lang="en-US" dirty="0"/>
+              <a:rPr lang="ar-SA" dirty="0">
+                <a:latin typeface="Amiri" pitchFamily="2" charset="-78"/>
+                <a:ea typeface="Amiri" pitchFamily="2" charset="-78"/>
+                <a:cs typeface="Amiri" pitchFamily="2" charset="-78"/>
+              </a:rPr>
               <a:t>B1 DICTATION (website). HIDE this slide during the dictation.
 Before: students write numbers 1–10; pens down; read the whole list once so the rhythm is predictable.
 During: say each word TWICE at a measured pace; leave a blank if needed and continue.
@@ -1506,7 +1510,11 @@
           <a:lstStyle/>
           <a:p>
             <a:r>
-              <a:rPr lang="en-US" dirty="0"/>
+              <a:rPr lang="ar-SA" dirty="0">
+                <a:latin typeface="Amiri" pitchFamily="2" charset="-78"/>
+                <a:ea typeface="Amiri" pitchFamily="2" charset="-78"/>
+                <a:cs typeface="Amiri" pitchFamily="2" charset="-78"/>
+              </a:rPr>
               <a:t>WELCOME (1 min) — while students join.
 • Greet each student by name as they arrive: السَّلَامُ عَلَيْكُمْ. Take the register (Pastoral Tracker: attendance 0/1).
 • 2-MINUTE CHECK-IN (SEND training): a private chat to any student who seemed unsettled last lesson — “Are you okay today? 👍 / 👎”.
@@ -2975,6 +2983,7 @@
                   <a:srgbClr val="D4AF37"/>
                 </a:solidFill>
                 <a:latin typeface="Amiri" pitchFamily="2" charset="-78"/>
+                <a:ea typeface="Amiri" pitchFamily="2" charset="-78"/>
                 <a:cs typeface="Amiri" pitchFamily="2" charset="-78"/>
               </a:rPr>
               <a:t>م</a:t>
@@ -3181,6 +3190,7 @@
                   <a:srgbClr val="D4AF37"/>
                 </a:solidFill>
                 <a:latin typeface="Amiri" pitchFamily="2" charset="-78"/>
+                <a:ea typeface="Amiri" pitchFamily="2" charset="-78"/>
                 <a:cs typeface="Amiri" pitchFamily="2" charset="-78"/>
               </a:rPr>
               <a:t>مُرَاجَعَةُ الوَحْدَةِ الأُولَى وَتَقْيِيمُهَا</a:t>
@@ -3638,6 +3648,7 @@
                   <a:srgbClr val="D4AF37"/>
                 </a:solidFill>
                 <a:latin typeface="Amiri" pitchFamily="2" charset="-78"/>
+                <a:ea typeface="Amiri" pitchFamily="2" charset="-78"/>
                 <a:cs typeface="Amiri" pitchFamily="2" charset="-78"/>
               </a:rPr>
               <a:t>م</a:t>
@@ -3958,6 +3969,7 @@
                   <a:srgbClr val="8A6D1E"/>
                 </a:solidFill>
                 <a:latin typeface="Amiri" pitchFamily="2" charset="-78"/>
+                <a:ea typeface="Amiri" pitchFamily="2" charset="-78"/>
                 <a:cs typeface="Amiri" pitchFamily="2" charset="-78"/>
               </a:rPr>
               <a:t>العَلَامَاتُ</a:t>
@@ -4169,6 +4181,7 @@
                   <a:srgbClr val="1B3B6F"/>
                 </a:solidFill>
                 <a:latin typeface="Amiri" pitchFamily="2" charset="-78"/>
+                <a:ea typeface="Amiri" pitchFamily="2" charset="-78"/>
                 <a:cs typeface="Amiri" pitchFamily="2" charset="-78"/>
               </a:rPr>
               <a:t>بَ</a:t>
@@ -4645,6 +4658,7 @@
                   <a:srgbClr val="1B3B6F"/>
                 </a:solidFill>
                 <a:latin typeface="Amiri" pitchFamily="2" charset="-78"/>
+                <a:ea typeface="Amiri" pitchFamily="2" charset="-78"/>
                 <a:cs typeface="Amiri" pitchFamily="2" charset="-78"/>
               </a:rPr>
               <a:t>بُ</a:t>
@@ -5121,6 +5135,7 @@
                   <a:srgbClr val="1B3B6F"/>
                 </a:solidFill>
                 <a:latin typeface="Amiri" pitchFamily="2" charset="-78"/>
+                <a:ea typeface="Amiri" pitchFamily="2" charset="-78"/>
                 <a:cs typeface="Amiri" pitchFamily="2" charset="-78"/>
               </a:rPr>
               <a:t>بِ</a:t>
@@ -5597,6 +5612,7 @@
                   <a:srgbClr val="1B3B6F"/>
                 </a:solidFill>
                 <a:latin typeface="Amiri" pitchFamily="2" charset="-78"/>
+                <a:ea typeface="Amiri" pitchFamily="2" charset="-78"/>
                 <a:cs typeface="Amiri" pitchFamily="2" charset="-78"/>
               </a:rPr>
               <a:t>بْ</a:t>
@@ -6073,6 +6089,7 @@
                   <a:srgbClr val="1B3B6F"/>
                 </a:solidFill>
                 <a:latin typeface="Amiri" pitchFamily="2" charset="-78"/>
+                <a:ea typeface="Amiri" pitchFamily="2" charset="-78"/>
                 <a:cs typeface="Amiri" pitchFamily="2" charset="-78"/>
               </a:rPr>
               <a:t>بّ</a:t>
@@ -6635,6 +6652,7 @@
                   <a:srgbClr val="D4AF37"/>
                 </a:solidFill>
                 <a:latin typeface="Amiri" pitchFamily="2" charset="-78"/>
+                <a:ea typeface="Amiri" pitchFamily="2" charset="-78"/>
                 <a:cs typeface="Amiri" pitchFamily="2" charset="-78"/>
               </a:rPr>
               <a:t>م</a:t>
@@ -6955,6 +6973,7 @@
                   <a:srgbClr val="8A6D1E"/>
                 </a:solidFill>
                 <a:latin typeface="Amiri" pitchFamily="2" charset="-78"/>
+                <a:ea typeface="Amiri" pitchFamily="2" charset="-78"/>
                 <a:cs typeface="Amiri" pitchFamily="2" charset="-78"/>
               </a:rPr>
               <a:t>الإِجَابَاتُ</a:t>
@@ -7166,6 +7185,7 @@
                   <a:srgbClr val="1B3B6F"/>
                 </a:solidFill>
                 <a:latin typeface="Amiri" pitchFamily="2" charset="-78"/>
+                <a:ea typeface="Amiri" pitchFamily="2" charset="-78"/>
                 <a:cs typeface="Amiri" pitchFamily="2" charset="-78"/>
               </a:rPr>
               <a:t>بَ</a:t>
@@ -7707,6 +7727,7 @@
                   <a:srgbClr val="1B3B6F"/>
                 </a:solidFill>
                 <a:latin typeface="Amiri" pitchFamily="2" charset="-78"/>
+                <a:ea typeface="Amiri" pitchFamily="2" charset="-78"/>
                 <a:cs typeface="Amiri" pitchFamily="2" charset="-78"/>
               </a:rPr>
               <a:t>بُ</a:t>
@@ -8248,6 +8269,7 @@
                   <a:srgbClr val="1B3B6F"/>
                 </a:solidFill>
                 <a:latin typeface="Amiri" pitchFamily="2" charset="-78"/>
+                <a:ea typeface="Amiri" pitchFamily="2" charset="-78"/>
                 <a:cs typeface="Amiri" pitchFamily="2" charset="-78"/>
               </a:rPr>
               <a:t>بِ</a:t>
@@ -8789,6 +8811,7 @@
                   <a:srgbClr val="1B3B6F"/>
                 </a:solidFill>
                 <a:latin typeface="Amiri" pitchFamily="2" charset="-78"/>
+                <a:ea typeface="Amiri" pitchFamily="2" charset="-78"/>
                 <a:cs typeface="Amiri" pitchFamily="2" charset="-78"/>
               </a:rPr>
               <a:t>بْ</a:t>
@@ -9330,6 +9353,7 @@
                   <a:srgbClr val="1B3B6F"/>
                 </a:solidFill>
                 <a:latin typeface="Amiri" pitchFamily="2" charset="-78"/>
+                <a:ea typeface="Amiri" pitchFamily="2" charset="-78"/>
                 <a:cs typeface="Amiri" pitchFamily="2" charset="-78"/>
               </a:rPr>
               <a:t>بّ</a:t>
@@ -9957,6 +9981,7 @@
                   <a:srgbClr val="D4AF37"/>
                 </a:solidFill>
                 <a:latin typeface="Amiri" pitchFamily="2" charset="-78"/>
+                <a:ea typeface="Amiri" pitchFamily="2" charset="-78"/>
                 <a:cs typeface="Amiri" pitchFamily="2" charset="-78"/>
               </a:rPr>
               <a:t>م</a:t>
@@ -10277,6 +10302,7 @@
                   <a:srgbClr val="8A6D1E"/>
                 </a:solidFill>
                 <a:latin typeface="Amiri" pitchFamily="2" charset="-78"/>
+                <a:ea typeface="Amiri" pitchFamily="2" charset="-78"/>
                 <a:cs typeface="Amiri" pitchFamily="2" charset="-78"/>
               </a:rPr>
               <a:t>الأَرْقَامُ</a:t>
@@ -10551,6 +10577,7 @@
                   <a:srgbClr val="1F2A37"/>
                 </a:solidFill>
                 <a:latin typeface="Amiri" pitchFamily="2" charset="-78"/>
+                <a:ea typeface="Amiri" pitchFamily="2" charset="-78"/>
                 <a:cs typeface="Amiri" pitchFamily="2" charset="-78"/>
               </a:rPr>
               <a:t>٢</a:t>
@@ -10652,6 +10679,7 @@
                   <a:srgbClr val="1F2A37"/>
                 </a:solidFill>
                 <a:latin typeface="Amiri" pitchFamily="2" charset="-78"/>
+                <a:ea typeface="Amiri" pitchFamily="2" charset="-78"/>
                 <a:cs typeface="Amiri" pitchFamily="2" charset="-78"/>
               </a:rPr>
               <a:t>٣</a:t>
@@ -10753,6 +10781,7 @@
                   <a:srgbClr val="1F2A37"/>
                 </a:solidFill>
                 <a:latin typeface="Amiri" pitchFamily="2" charset="-78"/>
+                <a:ea typeface="Amiri" pitchFamily="2" charset="-78"/>
                 <a:cs typeface="Amiri" pitchFamily="2" charset="-78"/>
               </a:rPr>
               <a:t>٤</a:t>
@@ -10989,6 +11018,7 @@
                   <a:srgbClr val="1F2A37"/>
                 </a:solidFill>
                 <a:latin typeface="Amiri" pitchFamily="2" charset="-78"/>
+                <a:ea typeface="Amiri" pitchFamily="2" charset="-78"/>
                 <a:cs typeface="Amiri" pitchFamily="2" charset="-78"/>
               </a:rPr>
               <a:t>٦</a:t>
@@ -11090,6 +11120,7 @@
                   <a:srgbClr val="1F2A37"/>
                 </a:solidFill>
                 <a:latin typeface="Amiri" pitchFamily="2" charset="-78"/>
+                <a:ea typeface="Amiri" pitchFamily="2" charset="-78"/>
                 <a:cs typeface="Amiri" pitchFamily="2" charset="-78"/>
               </a:rPr>
               <a:t>٧</a:t>
@@ -11191,6 +11222,7 @@
                   <a:srgbClr val="1F2A37"/>
                 </a:solidFill>
                 <a:latin typeface="Amiri" pitchFamily="2" charset="-78"/>
+                <a:ea typeface="Amiri" pitchFamily="2" charset="-78"/>
                 <a:cs typeface="Amiri" pitchFamily="2" charset="-78"/>
               </a:rPr>
               <a:t>٨</a:t>
@@ -11427,6 +11459,7 @@
                   <a:srgbClr val="1F2A37"/>
                 </a:solidFill>
                 <a:latin typeface="Amiri" pitchFamily="2" charset="-78"/>
+                <a:ea typeface="Amiri" pitchFamily="2" charset="-78"/>
                 <a:cs typeface="Amiri" pitchFamily="2" charset="-78"/>
               </a:rPr>
               <a:t>٥١</a:t>
@@ -11528,6 +11561,7 @@
                   <a:srgbClr val="1F2A37"/>
                 </a:solidFill>
                 <a:latin typeface="Amiri" pitchFamily="2" charset="-78"/>
+                <a:ea typeface="Amiri" pitchFamily="2" charset="-78"/>
                 <a:cs typeface="Amiri" pitchFamily="2" charset="-78"/>
               </a:rPr>
               <a:t>١٠٥</a:t>
@@ -11629,6 +11663,7 @@
                   <a:srgbClr val="1F2A37"/>
                 </a:solidFill>
                 <a:latin typeface="Amiri" pitchFamily="2" charset="-78"/>
+                <a:ea typeface="Amiri" pitchFamily="2" charset="-78"/>
                 <a:cs typeface="Amiri" pitchFamily="2" charset="-78"/>
               </a:rPr>
               <a:t>١٥</a:t>
@@ -11865,6 +11900,7 @@
                   <a:srgbClr val="1F2A37"/>
                 </a:solidFill>
                 <a:latin typeface="Amiri" pitchFamily="2" charset="-78"/>
+                <a:ea typeface="Amiri" pitchFamily="2" charset="-78"/>
                 <a:cs typeface="Amiri" pitchFamily="2" charset="-78"/>
               </a:rPr>
               <a:t>٢٠</a:t>
@@ -11966,6 +12002,7 @@
                   <a:srgbClr val="1F2A37"/>
                 </a:solidFill>
                 <a:latin typeface="Amiri" pitchFamily="2" charset="-78"/>
+                <a:ea typeface="Amiri" pitchFamily="2" charset="-78"/>
                 <a:cs typeface="Amiri" pitchFamily="2" charset="-78"/>
               </a:rPr>
               <a:t>٢</a:t>
@@ -12067,6 +12104,7 @@
                   <a:srgbClr val="1F2A37"/>
                 </a:solidFill>
                 <a:latin typeface="Amiri" pitchFamily="2" charset="-78"/>
+                <a:ea typeface="Amiri" pitchFamily="2" charset="-78"/>
                 <a:cs typeface="Amiri" pitchFamily="2" charset="-78"/>
               </a:rPr>
               <a:t>٢٠٠</a:t>
@@ -12303,6 +12341,7 @@
                   <a:srgbClr val="1F2A37"/>
                 </a:solidFill>
                 <a:latin typeface="Amiri" pitchFamily="2" charset="-78"/>
+                <a:ea typeface="Amiri" pitchFamily="2" charset="-78"/>
                 <a:cs typeface="Amiri" pitchFamily="2" charset="-78"/>
               </a:rPr>
               <a:t>١٠</a:t>
@@ -12404,6 +12443,7 @@
                   <a:srgbClr val="1F2A37"/>
                 </a:solidFill>
                 <a:latin typeface="Amiri" pitchFamily="2" charset="-78"/>
+                <a:ea typeface="Amiri" pitchFamily="2" charset="-78"/>
                 <a:cs typeface="Amiri" pitchFamily="2" charset="-78"/>
               </a:rPr>
               <a:t>١٠٠</a:t>
@@ -12505,6 +12545,7 @@
                   <a:srgbClr val="1F2A37"/>
                 </a:solidFill>
                 <a:latin typeface="Amiri" pitchFamily="2" charset="-78"/>
+                <a:ea typeface="Amiri" pitchFamily="2" charset="-78"/>
                 <a:cs typeface="Amiri" pitchFamily="2" charset="-78"/>
               </a:rPr>
               <a:t>١٠٠٠</a:t>
@@ -12764,6 +12805,7 @@
                   <a:srgbClr val="D4AF37"/>
                 </a:solidFill>
                 <a:latin typeface="Amiri" pitchFamily="2" charset="-78"/>
+                <a:ea typeface="Amiri" pitchFamily="2" charset="-78"/>
                 <a:cs typeface="Amiri" pitchFamily="2" charset="-78"/>
               </a:rPr>
               <a:t>م</a:t>
@@ -13084,6 +13126,7 @@
                   <a:srgbClr val="8A6D1E"/>
                 </a:solidFill>
                 <a:latin typeface="Amiri" pitchFamily="2" charset="-78"/>
+                <a:ea typeface="Amiri" pitchFamily="2" charset="-78"/>
                 <a:cs typeface="Amiri" pitchFamily="2" charset="-78"/>
               </a:rPr>
               <a:t>الإِجَابَاتُ</a:t>
@@ -13358,6 +13401,7 @@
                   <a:srgbClr val="9AA1AB"/>
                 </a:solidFill>
                 <a:latin typeface="Amiri" pitchFamily="2" charset="-78"/>
+                <a:ea typeface="Amiri" pitchFamily="2" charset="-78"/>
                 <a:cs typeface="Amiri" pitchFamily="2" charset="-78"/>
               </a:rPr>
               <a:t>٢</a:t>
@@ -13486,6 +13530,7 @@
                   <a:srgbClr val="1F2A37"/>
                 </a:solidFill>
                 <a:latin typeface="Amiri" pitchFamily="2" charset="-78"/>
+                <a:ea typeface="Amiri" pitchFamily="2" charset="-78"/>
                 <a:cs typeface="Amiri" pitchFamily="2" charset="-78"/>
               </a:rPr>
               <a:t>٣</a:t>
@@ -13587,6 +13632,7 @@
                   <a:srgbClr val="9AA1AB"/>
                 </a:solidFill>
                 <a:latin typeface="Amiri" pitchFamily="2" charset="-78"/>
+                <a:ea typeface="Amiri" pitchFamily="2" charset="-78"/>
                 <a:cs typeface="Amiri" pitchFamily="2" charset="-78"/>
               </a:rPr>
               <a:t>٤</a:t>
@@ -13861,6 +13907,7 @@
                   <a:srgbClr val="9AA1AB"/>
                 </a:solidFill>
                 <a:latin typeface="Amiri" pitchFamily="2" charset="-78"/>
+                <a:ea typeface="Amiri" pitchFamily="2" charset="-78"/>
                 <a:cs typeface="Amiri" pitchFamily="2" charset="-78"/>
               </a:rPr>
               <a:t>٦</a:t>
@@ -13989,6 +14036,7 @@
                   <a:srgbClr val="1F2A37"/>
                 </a:solidFill>
                 <a:latin typeface="Amiri" pitchFamily="2" charset="-78"/>
+                <a:ea typeface="Amiri" pitchFamily="2" charset="-78"/>
                 <a:cs typeface="Amiri" pitchFamily="2" charset="-78"/>
               </a:rPr>
               <a:t>٧</a:t>
@@ -14090,6 +14138,7 @@
                   <a:srgbClr val="9AA1AB"/>
                 </a:solidFill>
                 <a:latin typeface="Amiri" pitchFamily="2" charset="-78"/>
+                <a:ea typeface="Amiri" pitchFamily="2" charset="-78"/>
                 <a:cs typeface="Amiri" pitchFamily="2" charset="-78"/>
               </a:rPr>
               <a:t>٨</a:t>
@@ -14364,6 +14413,7 @@
                   <a:srgbClr val="9AA1AB"/>
                 </a:solidFill>
                 <a:latin typeface="Amiri" pitchFamily="2" charset="-78"/>
+                <a:ea typeface="Amiri" pitchFamily="2" charset="-78"/>
                 <a:cs typeface="Amiri" pitchFamily="2" charset="-78"/>
               </a:rPr>
               <a:t>٥١</a:t>
@@ -14465,6 +14515,7 @@
                   <a:srgbClr val="9AA1AB"/>
                 </a:solidFill>
                 <a:latin typeface="Amiri" pitchFamily="2" charset="-78"/>
+                <a:ea typeface="Amiri" pitchFamily="2" charset="-78"/>
                 <a:cs typeface="Amiri" pitchFamily="2" charset="-78"/>
               </a:rPr>
               <a:t>١٠٥</a:t>
@@ -14593,6 +14644,7 @@
                   <a:srgbClr val="1F2A37"/>
                 </a:solidFill>
                 <a:latin typeface="Amiri" pitchFamily="2" charset="-78"/>
+                <a:ea typeface="Amiri" pitchFamily="2" charset="-78"/>
                 <a:cs typeface="Amiri" pitchFamily="2" charset="-78"/>
               </a:rPr>
               <a:t>١٥</a:t>
@@ -14894,6 +14946,7 @@
                   <a:srgbClr val="1F2A37"/>
                 </a:solidFill>
                 <a:latin typeface="Amiri" pitchFamily="2" charset="-78"/>
+                <a:ea typeface="Amiri" pitchFamily="2" charset="-78"/>
                 <a:cs typeface="Amiri" pitchFamily="2" charset="-78"/>
               </a:rPr>
               <a:t>٢٠</a:t>
@@ -14995,6 +15048,7 @@
                   <a:srgbClr val="9AA1AB"/>
                 </a:solidFill>
                 <a:latin typeface="Amiri" pitchFamily="2" charset="-78"/>
+                <a:ea typeface="Amiri" pitchFamily="2" charset="-78"/>
                 <a:cs typeface="Amiri" pitchFamily="2" charset="-78"/>
               </a:rPr>
               <a:t>٢</a:t>
@@ -15096,6 +15150,7 @@
                   <a:srgbClr val="9AA1AB"/>
                 </a:solidFill>
                 <a:latin typeface="Amiri" pitchFamily="2" charset="-78"/>
+                <a:ea typeface="Amiri" pitchFamily="2" charset="-78"/>
                 <a:cs typeface="Amiri" pitchFamily="2" charset="-78"/>
               </a:rPr>
               <a:t>٢٠٠</a:t>
@@ -15370,6 +15425,7 @@
                   <a:srgbClr val="9AA1AB"/>
                 </a:solidFill>
                 <a:latin typeface="Amiri" pitchFamily="2" charset="-78"/>
+                <a:ea typeface="Amiri" pitchFamily="2" charset="-78"/>
                 <a:cs typeface="Amiri" pitchFamily="2" charset="-78"/>
               </a:rPr>
               <a:t>١٠</a:t>
@@ -15498,6 +15554,7 @@
                   <a:srgbClr val="1F2A37"/>
                 </a:solidFill>
                 <a:latin typeface="Amiri" pitchFamily="2" charset="-78"/>
+                <a:ea typeface="Amiri" pitchFamily="2" charset="-78"/>
                 <a:cs typeface="Amiri" pitchFamily="2" charset="-78"/>
               </a:rPr>
               <a:t>١٠٠</a:t>
@@ -15599,6 +15656,7 @@
                   <a:srgbClr val="9AA1AB"/>
                 </a:solidFill>
                 <a:latin typeface="Amiri" pitchFamily="2" charset="-78"/>
+                <a:ea typeface="Amiri" pitchFamily="2" charset="-78"/>
                 <a:cs typeface="Amiri" pitchFamily="2" charset="-78"/>
               </a:rPr>
               <a:t>١٠٠٠</a:t>
@@ -15896,6 +15954,7 @@
                   <a:srgbClr val="D4AF37"/>
                 </a:solidFill>
                 <a:latin typeface="Amiri" pitchFamily="2" charset="-78"/>
+                <a:ea typeface="Amiri" pitchFamily="2" charset="-78"/>
                 <a:cs typeface="Amiri" pitchFamily="2" charset="-78"/>
               </a:rPr>
               <a:t>م</a:t>
@@ -16216,6 +16275,7 @@
                   <a:srgbClr val="8A6D1E"/>
                 </a:solidFill>
                 <a:latin typeface="Amiri" pitchFamily="2" charset="-78"/>
+                <a:ea typeface="Amiri" pitchFamily="2" charset="-78"/>
                 <a:cs typeface="Amiri" pitchFamily="2" charset="-78"/>
               </a:rPr>
               <a:t>إِمْلَاءُ عَشْرِ كَلِمَاتٍ</a:t>
@@ -16420,6 +16480,7 @@
                   <a:srgbClr val="1B3B6F"/>
                 </a:solidFill>
                 <a:latin typeface="Amiri" pitchFamily="2" charset="-78"/>
+                <a:ea typeface="Amiri" pitchFamily="2" charset="-78"/>
                 <a:cs typeface="Amiri" pitchFamily="2" charset="-78"/>
               </a:rPr>
               <a:t>بَابٌ · كِتَابٌ · قَلَمٌ · مَدْرَسَةٌ · بَيْتٌ</a:t>
@@ -16496,6 +16557,7 @@
                   <a:srgbClr val="1B3B6F"/>
                 </a:solidFill>
                 <a:latin typeface="Amiri" pitchFamily="2" charset="-78"/>
+                <a:ea typeface="Amiri" pitchFamily="2" charset="-78"/>
                 <a:cs typeface="Amiri" pitchFamily="2" charset="-78"/>
               </a:rPr>
               <a:t>مُعَلِّمٌ · طَالِبٌ · يَدٌ · عَيْنٌ · كَلِمَةٌ</a:t>
@@ -16770,6 +16832,7 @@
                   <a:srgbClr val="D4AF37"/>
                 </a:solidFill>
                 <a:latin typeface="Amiri" pitchFamily="2" charset="-78"/>
+                <a:ea typeface="Amiri" pitchFamily="2" charset="-78"/>
                 <a:cs typeface="Amiri" pitchFamily="2" charset="-78"/>
               </a:rPr>
               <a:t>م</a:t>
@@ -17090,6 +17153,7 @@
                   <a:srgbClr val="8A6D1E"/>
                 </a:solidFill>
                 <a:latin typeface="Amiri" pitchFamily="2" charset="-78"/>
+                <a:ea typeface="Amiri" pitchFamily="2" charset="-78"/>
                 <a:cs typeface="Amiri" pitchFamily="2" charset="-78"/>
               </a:rPr>
               <a:t>قِرَاءَةُ كَلِمَاتٍ مَشْكُولَةٍ</a:t>
@@ -17301,6 +17365,7 @@
                   <a:srgbClr val="1B3B6F"/>
                 </a:solidFill>
                 <a:latin typeface="Amiri" pitchFamily="2" charset="-78"/>
+                <a:ea typeface="Amiri" pitchFamily="2" charset="-78"/>
                 <a:cs typeface="Amiri" pitchFamily="2" charset="-78"/>
               </a:rPr>
               <a:t>بَاب</a:t>
@@ -17777,6 +17842,7 @@
                   <a:srgbClr val="1B3B6F"/>
                 </a:solidFill>
                 <a:latin typeface="Amiri" pitchFamily="2" charset="-78"/>
+                <a:ea typeface="Amiri" pitchFamily="2" charset="-78"/>
                 <a:cs typeface="Amiri" pitchFamily="2" charset="-78"/>
               </a:rPr>
               <a:t>مَدْرَسَة</a:t>
@@ -18253,6 +18319,7 @@
                   <a:srgbClr val="1B3B6F"/>
                 </a:solidFill>
                 <a:latin typeface="Amiri" pitchFamily="2" charset="-78"/>
+                <a:ea typeface="Amiri" pitchFamily="2" charset="-78"/>
                 <a:cs typeface="Amiri" pitchFamily="2" charset="-78"/>
               </a:rPr>
               <a:t>مُعَلِّم</a:t>
@@ -18729,6 +18796,7 @@
                   <a:srgbClr val="1B3B6F"/>
                 </a:solidFill>
                 <a:latin typeface="Amiri" pitchFamily="2" charset="-78"/>
+                <a:ea typeface="Amiri" pitchFamily="2" charset="-78"/>
                 <a:cs typeface="Amiri" pitchFamily="2" charset="-78"/>
               </a:rPr>
               <a:t>عَيْن</a:t>
@@ -19205,6 +19273,7 @@
                   <a:srgbClr val="1B3B6F"/>
                 </a:solidFill>
                 <a:latin typeface="Amiri" pitchFamily="2" charset="-78"/>
+                <a:ea typeface="Amiri" pitchFamily="2" charset="-78"/>
                 <a:cs typeface="Amiri" pitchFamily="2" charset="-78"/>
               </a:rPr>
               <a:t>ثَلَاثَة</a:t>
@@ -19799,6 +19868,7 @@
                   <a:srgbClr val="D4AF37"/>
                 </a:solidFill>
                 <a:latin typeface="Amiri" pitchFamily="2" charset="-78"/>
+                <a:ea typeface="Amiri" pitchFamily="2" charset="-78"/>
                 <a:cs typeface="Amiri" pitchFamily="2" charset="-78"/>
               </a:rPr>
               <a:t>م</a:t>
@@ -20119,6 +20189,7 @@
                   <a:srgbClr val="8A6D1E"/>
                 </a:solidFill>
                 <a:latin typeface="Amiri" pitchFamily="2" charset="-78"/>
+                <a:ea typeface="Amiri" pitchFamily="2" charset="-78"/>
                 <a:cs typeface="Amiri" pitchFamily="2" charset="-78"/>
               </a:rPr>
               <a:t>الإِجَابَاتُ</a:t>
@@ -20330,6 +20401,7 @@
                   <a:srgbClr val="1B3B6F"/>
                 </a:solidFill>
                 <a:latin typeface="Amiri" pitchFamily="2" charset="-78"/>
+                <a:ea typeface="Amiri" pitchFamily="2" charset="-78"/>
                 <a:cs typeface="Amiri" pitchFamily="2" charset="-78"/>
               </a:rPr>
               <a:t>بَاب</a:t>
@@ -20871,6 +20943,7 @@
                   <a:srgbClr val="1B3B6F"/>
                 </a:solidFill>
                 <a:latin typeface="Amiri" pitchFamily="2" charset="-78"/>
+                <a:ea typeface="Amiri" pitchFamily="2" charset="-78"/>
                 <a:cs typeface="Amiri" pitchFamily="2" charset="-78"/>
               </a:rPr>
               <a:t>مَدْرَسَة</a:t>
@@ -21412,6 +21485,7 @@
                   <a:srgbClr val="1B3B6F"/>
                 </a:solidFill>
                 <a:latin typeface="Amiri" pitchFamily="2" charset="-78"/>
+                <a:ea typeface="Amiri" pitchFamily="2" charset="-78"/>
                 <a:cs typeface="Amiri" pitchFamily="2" charset="-78"/>
               </a:rPr>
               <a:t>مُعَلِّم</a:t>
@@ -21953,6 +22027,7 @@
                   <a:srgbClr val="1B3B6F"/>
                 </a:solidFill>
                 <a:latin typeface="Amiri" pitchFamily="2" charset="-78"/>
+                <a:ea typeface="Amiri" pitchFamily="2" charset="-78"/>
                 <a:cs typeface="Amiri" pitchFamily="2" charset="-78"/>
               </a:rPr>
               <a:t>عَيْن</a:t>
@@ -22494,6 +22569,7 @@
                   <a:srgbClr val="1B3B6F"/>
                 </a:solidFill>
                 <a:latin typeface="Amiri" pitchFamily="2" charset="-78"/>
+                <a:ea typeface="Amiri" pitchFamily="2" charset="-78"/>
                 <a:cs typeface="Amiri" pitchFamily="2" charset="-78"/>
               </a:rPr>
               <a:t>ثَلَاثَة</a:t>
@@ -23153,6 +23229,7 @@
                   <a:srgbClr val="D4AF37"/>
                 </a:solidFill>
                 <a:latin typeface="Amiri" pitchFamily="2" charset="-78"/>
+                <a:ea typeface="Amiri" pitchFamily="2" charset="-78"/>
                 <a:cs typeface="Amiri" pitchFamily="2" charset="-78"/>
               </a:rPr>
               <a:t>م</a:t>
@@ -23473,6 +23550,7 @@
                   <a:srgbClr val="8A6D1E"/>
                 </a:solidFill>
                 <a:latin typeface="Amiri" pitchFamily="2" charset="-78"/>
+                <a:ea typeface="Amiri" pitchFamily="2" charset="-78"/>
                 <a:cs typeface="Amiri" pitchFamily="2" charset="-78"/>
               </a:rPr>
               <a:t>لَافِتَاتٌ</a:t>
@@ -23684,6 +23762,7 @@
                   <a:srgbClr val="1B3B6F"/>
                 </a:solidFill>
                 <a:latin typeface="Amiri" pitchFamily="2" charset="-78"/>
+                <a:ea typeface="Amiri" pitchFamily="2" charset="-78"/>
                 <a:cs typeface="Amiri" pitchFamily="2" charset="-78"/>
               </a:rPr>
               <a:t>مدرسة</a:t>
@@ -24160,6 +24239,7 @@
                   <a:srgbClr val="1B3B6F"/>
                 </a:solidFill>
                 <a:latin typeface="Amiri" pitchFamily="2" charset="-78"/>
+                <a:ea typeface="Amiri" pitchFamily="2" charset="-78"/>
                 <a:cs typeface="Amiri" pitchFamily="2" charset="-78"/>
               </a:rPr>
               <a:t>مطعم</a:t>
@@ -24636,6 +24716,7 @@
                   <a:srgbClr val="1B3B6F"/>
                 </a:solidFill>
                 <a:latin typeface="Amiri" pitchFamily="2" charset="-78"/>
+                <a:ea typeface="Amiri" pitchFamily="2" charset="-78"/>
                 <a:cs typeface="Amiri" pitchFamily="2" charset="-78"/>
               </a:rPr>
               <a:t>مستشفى</a:t>
@@ -25112,6 +25193,7 @@
                   <a:srgbClr val="1B3B6F"/>
                 </a:solidFill>
                 <a:latin typeface="Amiri" pitchFamily="2" charset="-78"/>
+                <a:ea typeface="Amiri" pitchFamily="2" charset="-78"/>
                 <a:cs typeface="Amiri" pitchFamily="2" charset="-78"/>
               </a:rPr>
               <a:t>محطة</a:t>
@@ -25588,6 +25670,7 @@
                   <a:srgbClr val="1B3B6F"/>
                 </a:solidFill>
                 <a:latin typeface="Amiri" pitchFamily="2" charset="-78"/>
+                <a:ea typeface="Amiri" pitchFamily="2" charset="-78"/>
                 <a:cs typeface="Amiri" pitchFamily="2" charset="-78"/>
               </a:rPr>
               <a:t>مستشفى</a:t>
@@ -25689,6 +25772,7 @@
                   <a:srgbClr val="1F2A37"/>
                 </a:solidFill>
                 <a:latin typeface="Amiri" pitchFamily="2" charset="-78"/>
+                <a:ea typeface="Amiri" pitchFamily="2" charset="-78"/>
                 <a:cs typeface="Amiri" pitchFamily="2" charset="-78"/>
               </a:rPr>
               <a:t>ة</a:t>
@@ -25790,6 +25874,7 @@
                   <a:srgbClr val="1F2A37"/>
                 </a:solidFill>
                 <a:latin typeface="Amiri" pitchFamily="2" charset="-78"/>
+                <a:ea typeface="Amiri" pitchFamily="2" charset="-78"/>
                 <a:cs typeface="Amiri" pitchFamily="2" charset="-78"/>
               </a:rPr>
               <a:t>و</a:t>
@@ -25891,6 +25976,7 @@
                   <a:srgbClr val="1F2A37"/>
                 </a:solidFill>
                 <a:latin typeface="Amiri" pitchFamily="2" charset="-78"/>
+                <a:ea typeface="Amiri" pitchFamily="2" charset="-78"/>
                 <a:cs typeface="Amiri" pitchFamily="2" charset="-78"/>
               </a:rPr>
               <a:t>ى</a:t>
@@ -26166,6 +26252,7 @@
                   <a:srgbClr val="D4AF37"/>
                 </a:solidFill>
                 <a:latin typeface="Amiri" pitchFamily="2" charset="-78"/>
+                <a:ea typeface="Amiri" pitchFamily="2" charset="-78"/>
                 <a:cs typeface="Amiri" pitchFamily="2" charset="-78"/>
               </a:rPr>
               <a:t>م</a:t>
@@ -26486,6 +26573,7 @@
                   <a:srgbClr val="8A6D1E"/>
                 </a:solidFill>
                 <a:latin typeface="Amiri" pitchFamily="2" charset="-78"/>
+                <a:ea typeface="Amiri" pitchFamily="2" charset="-78"/>
                 <a:cs typeface="Amiri" pitchFamily="2" charset="-78"/>
               </a:rPr>
               <a:t>الإِجَابَاتُ</a:t>
@@ -26697,6 +26785,7 @@
                   <a:srgbClr val="1B3B6F"/>
                 </a:solidFill>
                 <a:latin typeface="Amiri" pitchFamily="2" charset="-78"/>
+                <a:ea typeface="Amiri" pitchFamily="2" charset="-78"/>
                 <a:cs typeface="Amiri" pitchFamily="2" charset="-78"/>
               </a:rPr>
               <a:t>مدرسة</a:t>
@@ -27238,6 +27327,7 @@
                   <a:srgbClr val="1B3B6F"/>
                 </a:solidFill>
                 <a:latin typeface="Amiri" pitchFamily="2" charset="-78"/>
+                <a:ea typeface="Amiri" pitchFamily="2" charset="-78"/>
                 <a:cs typeface="Amiri" pitchFamily="2" charset="-78"/>
               </a:rPr>
               <a:t>مطعم</a:t>
@@ -27779,6 +27869,7 @@
                   <a:srgbClr val="1B3B6F"/>
                 </a:solidFill>
                 <a:latin typeface="Amiri" pitchFamily="2" charset="-78"/>
+                <a:ea typeface="Amiri" pitchFamily="2" charset="-78"/>
                 <a:cs typeface="Amiri" pitchFamily="2" charset="-78"/>
               </a:rPr>
               <a:t>مستشفى</a:t>
@@ -28320,6 +28411,7 @@
                   <a:srgbClr val="1B3B6F"/>
                 </a:solidFill>
                 <a:latin typeface="Amiri" pitchFamily="2" charset="-78"/>
+                <a:ea typeface="Amiri" pitchFamily="2" charset="-78"/>
                 <a:cs typeface="Amiri" pitchFamily="2" charset="-78"/>
               </a:rPr>
               <a:t>محطة</a:t>
@@ -28861,6 +28953,7 @@
                   <a:srgbClr val="1B3B6F"/>
                 </a:solidFill>
                 <a:latin typeface="Amiri" pitchFamily="2" charset="-78"/>
+                <a:ea typeface="Amiri" pitchFamily="2" charset="-78"/>
                 <a:cs typeface="Amiri" pitchFamily="2" charset="-78"/>
               </a:rPr>
               <a:t>مستشفى</a:t>
@@ -28962,6 +29055,7 @@
                   <a:srgbClr val="9AA1AB"/>
                 </a:solidFill>
                 <a:latin typeface="Amiri" pitchFamily="2" charset="-78"/>
+                <a:ea typeface="Amiri" pitchFamily="2" charset="-78"/>
                 <a:cs typeface="Amiri" pitchFamily="2" charset="-78"/>
               </a:rPr>
               <a:t>ة</a:t>
@@ -29063,6 +29157,7 @@
                   <a:srgbClr val="9AA1AB"/>
                 </a:solidFill>
                 <a:latin typeface="Amiri" pitchFamily="2" charset="-78"/>
+                <a:ea typeface="Amiri" pitchFamily="2" charset="-78"/>
                 <a:cs typeface="Amiri" pitchFamily="2" charset="-78"/>
               </a:rPr>
               <a:t>و</a:t>
@@ -29191,6 +29286,7 @@
                   <a:srgbClr val="1F2A37"/>
                 </a:solidFill>
                 <a:latin typeface="Amiri" pitchFamily="2" charset="-78"/>
+                <a:ea typeface="Amiri" pitchFamily="2" charset="-78"/>
                 <a:cs typeface="Amiri" pitchFamily="2" charset="-78"/>
               </a:rPr>
               <a:t>ى</a:t>
@@ -29504,6 +29600,7 @@
                   <a:srgbClr val="D4AF37"/>
                 </a:solidFill>
                 <a:latin typeface="Amiri" pitchFamily="2" charset="-78"/>
+                <a:ea typeface="Amiri" pitchFamily="2" charset="-78"/>
                 <a:cs typeface="Amiri" pitchFamily="2" charset="-78"/>
               </a:rPr>
               <a:t>م</a:t>
@@ -29824,6 +29921,7 @@
                   <a:srgbClr val="8A6D1E"/>
                 </a:solidFill>
                 <a:latin typeface="Amiri" pitchFamily="2" charset="-78"/>
+                <a:ea typeface="Amiri" pitchFamily="2" charset="-78"/>
                 <a:cs typeface="Amiri" pitchFamily="2" charset="-78"/>
               </a:rPr>
               <a:t>القِرَاءَةُ الجَهْرِيَّةُ</a:t>
@@ -29927,6 +30025,7 @@
                   <a:srgbClr val="1B3B6F"/>
                 </a:solidFill>
                 <a:latin typeface="Amiri" pitchFamily="2" charset="-78"/>
+                <a:ea typeface="Amiri" pitchFamily="2" charset="-78"/>
                 <a:cs typeface="Amiri" pitchFamily="2" charset="-78"/>
               </a:rPr>
               <a:t>هَذَا بَيْتٌ كَبِيرٌ وَفِيهِ حَدِيقَةٌ.</a:t>
@@ -30030,6 +30129,7 @@
                   <a:srgbClr val="1B3B6F"/>
                 </a:solidFill>
                 <a:latin typeface="Amiri" pitchFamily="2" charset="-78"/>
+                <a:ea typeface="Amiri" pitchFamily="2" charset="-78"/>
                 <a:cs typeface="Amiri" pitchFamily="2" charset="-78"/>
               </a:rPr>
               <a:t>هَذَا · بَيْتٌ · كَبِيرٌ · وَفِيهِ · حَدِيقَةٌ</a:t>
@@ -30133,6 +30233,7 @@
                   <a:srgbClr val="1B3B6F"/>
                 </a:solidFill>
                 <a:latin typeface="Amiri" pitchFamily="2" charset="-78"/>
+                <a:ea typeface="Amiri" pitchFamily="2" charset="-78"/>
                 <a:cs typeface="Amiri" pitchFamily="2" charset="-78"/>
               </a:rPr>
               <a:t>هذا بيت كبير وفيه حديقة جميلة. تسكن فيه أسرة صغيرة قرب المدرسة.</a:t>
@@ -30304,6 +30405,7 @@
                   <a:srgbClr val="D4AF37"/>
                 </a:solidFill>
                 <a:latin typeface="Amiri" pitchFamily="2" charset="-78"/>
+                <a:ea typeface="Amiri" pitchFamily="2" charset="-78"/>
                 <a:cs typeface="Amiri" pitchFamily="2" charset="-78"/>
               </a:rPr>
               <a:t>م</a:t>
@@ -30624,6 +30726,7 @@
                   <a:srgbClr val="8A6D1E"/>
                 </a:solidFill>
                 <a:latin typeface="Amiri" pitchFamily="2" charset="-78"/>
+                <a:ea typeface="Amiri" pitchFamily="2" charset="-78"/>
                 <a:cs typeface="Amiri" pitchFamily="2" charset="-78"/>
               </a:rPr>
               <a:t>آدَابُ الصَّفِّ</a:t>
@@ -32155,6 +32258,7 @@
                   <a:srgbClr val="D4AF37"/>
                 </a:solidFill>
                 <a:latin typeface="Amiri" pitchFamily="2" charset="-78"/>
+                <a:ea typeface="Amiri" pitchFamily="2" charset="-78"/>
                 <a:cs typeface="Amiri" pitchFamily="2" charset="-78"/>
               </a:rPr>
               <a:t>م</a:t>
@@ -32475,6 +32579,7 @@
                   <a:srgbClr val="8A6D1E"/>
                 </a:solidFill>
                 <a:latin typeface="Amiri" pitchFamily="2" charset="-78"/>
+                <a:ea typeface="Amiri" pitchFamily="2" charset="-78"/>
                 <a:cs typeface="Amiri" pitchFamily="2" charset="-78"/>
               </a:rPr>
               <a:t>مِنَ النَّتِيجَةِ إِلَى الهَدَفِ</a:t>
@@ -33609,6 +33714,7 @@
                   <a:srgbClr val="D4AF37"/>
                 </a:solidFill>
                 <a:latin typeface="Amiri" pitchFamily="2" charset="-78"/>
+                <a:ea typeface="Amiri" pitchFamily="2" charset="-78"/>
                 <a:cs typeface="Amiri" pitchFamily="2" charset="-78"/>
               </a:rPr>
               <a:t>م</a:t>
@@ -33929,6 +34035,7 @@
                   <a:srgbClr val="8A6D1E"/>
                 </a:solidFill>
                 <a:latin typeface="Amiri" pitchFamily="2" charset="-78"/>
+                <a:ea typeface="Amiri" pitchFamily="2" charset="-78"/>
                 <a:cs typeface="Amiri" pitchFamily="2" charset="-78"/>
               </a:rPr>
               <a:t>قَيِّمْ عَمَلَكَ</a:t>
@@ -35086,6 +35193,7 @@
                   <a:srgbClr val="D4AF37"/>
                 </a:solidFill>
                 <a:latin typeface="Amiri" pitchFamily="2" charset="-78"/>
+                <a:ea typeface="Amiri" pitchFamily="2" charset="-78"/>
                 <a:cs typeface="Amiri" pitchFamily="2" charset="-78"/>
               </a:rPr>
               <a:t>م</a:t>
@@ -35406,6 +35514,7 @@
                   <a:srgbClr val="8A6D1E"/>
                 </a:solidFill>
                 <a:latin typeface="Amiri" pitchFamily="2" charset="-78"/>
+                <a:ea typeface="Amiri" pitchFamily="2" charset="-78"/>
                 <a:cs typeface="Amiri" pitchFamily="2" charset="-78"/>
               </a:rPr>
               <a:t>التَّحْضِيرُ لِلدَّرْسِ القَادِمِ</a:t>
@@ -35619,6 +35728,7 @@
                   <a:srgbClr val="1B3B6F"/>
                 </a:solidFill>
                 <a:latin typeface="Amiri" pitchFamily="2" charset="-78"/>
+                <a:ea typeface="Amiri" pitchFamily="2" charset="-78"/>
                 <a:cs typeface="Amiri" pitchFamily="2" charset="-78"/>
               </a:rPr>
               <a:t>مَرْحَبًا</a:t>
@@ -35698,6 +35808,7 @@
                   <a:srgbClr val="1B3B6F"/>
                 </a:solidFill>
                 <a:latin typeface="Amiri" pitchFamily="2" charset="-78"/>
+                <a:ea typeface="Amiri" pitchFamily="2" charset="-78"/>
                 <a:cs typeface="Amiri" pitchFamily="2" charset="-78"/>
               </a:rPr>
               <a:t>السَّلَامُ عَلَيْكُمْ</a:t>
@@ -35777,6 +35888,7 @@
                   <a:srgbClr val="1B3B6F"/>
                 </a:solidFill>
                 <a:latin typeface="Amiri" pitchFamily="2" charset="-78"/>
+                <a:ea typeface="Amiri" pitchFamily="2" charset="-78"/>
                 <a:cs typeface="Amiri" pitchFamily="2" charset="-78"/>
               </a:rPr>
               <a:t>وَعَلَيْكُمُ السَّلَامُ</a:t>
@@ -35856,6 +35968,7 @@
                   <a:srgbClr val="1B3B6F"/>
                 </a:solidFill>
                 <a:latin typeface="Amiri" pitchFamily="2" charset="-78"/>
+                <a:ea typeface="Amiri" pitchFamily="2" charset="-78"/>
                 <a:cs typeface="Amiri" pitchFamily="2" charset="-78"/>
               </a:rPr>
               <a:t>اِسْمِي …</a:t>
@@ -35935,6 +36048,7 @@
                   <a:srgbClr val="1B3B6F"/>
                 </a:solidFill>
                 <a:latin typeface="Amiri" pitchFamily="2" charset="-78"/>
+                <a:ea typeface="Amiri" pitchFamily="2" charset="-78"/>
                 <a:cs typeface="Amiri" pitchFamily="2" charset="-78"/>
               </a:rPr>
               <a:t>مَا اسْمُكَ؟</a:t>
@@ -36090,6 +36204,7 @@
                   <a:srgbClr val="1B3B6F"/>
                 </a:solidFill>
                 <a:latin typeface="Amiri" pitchFamily="2" charset="-78"/>
+                <a:ea typeface="Amiri" pitchFamily="2" charset="-78"/>
                 <a:cs typeface="Amiri" pitchFamily="2" charset="-78"/>
               </a:rPr>
               <a:t>مَرْحَبًا! مَا اسْمُكَ؟</a:t>
@@ -36759,6 +36874,7 @@
                   <a:srgbClr val="FFFFFF"/>
                 </a:solidFill>
                 <a:latin typeface="Amiri" pitchFamily="2" charset="-78"/>
+                <a:ea typeface="Amiri" pitchFamily="2" charset="-78"/>
                 <a:cs typeface="Amiri" pitchFamily="2" charset="-78"/>
               </a:rPr>
               <a:t>أَحْسَنْتُمْ! إِلَى اللِّقَاءِ</a:t>
@@ -36911,6 +37027,7 @@
                   <a:srgbClr val="D4AF37"/>
                 </a:solidFill>
                 <a:latin typeface="Amiri" pitchFamily="2" charset="-78"/>
+                <a:ea typeface="Amiri" pitchFamily="2" charset="-78"/>
                 <a:cs typeface="Amiri" pitchFamily="2" charset="-78"/>
               </a:rPr>
               <a:t>التَّحِيَّاتُ</a:t>
@@ -37044,6 +37161,7 @@
                   <a:srgbClr val="D4AF37"/>
                 </a:solidFill>
                 <a:latin typeface="Amiri" pitchFamily="2" charset="-78"/>
+                <a:ea typeface="Amiri" pitchFamily="2" charset="-78"/>
                 <a:cs typeface="Amiri" pitchFamily="2" charset="-78"/>
               </a:rPr>
               <a:t>م</a:t>
@@ -37364,6 +37482,7 @@
                   <a:srgbClr val="8A6D1E"/>
                 </a:solidFill>
                 <a:latin typeface="Amiri" pitchFamily="2" charset="-78"/>
+                <a:ea typeface="Amiri" pitchFamily="2" charset="-78"/>
                 <a:cs typeface="Amiri" pitchFamily="2" charset="-78"/>
               </a:rPr>
               <a:t>خَرِيطَةُ الدَّرْسِ</a:t>
@@ -37678,6 +37797,7 @@
                   <a:srgbClr val="0E7C86"/>
                 </a:solidFill>
                 <a:latin typeface="Amiri" pitchFamily="2" charset="-78"/>
+                <a:ea typeface="Amiri" pitchFamily="2" charset="-78"/>
                 <a:cs typeface="Amiri" pitchFamily="2" charset="-78"/>
               </a:rPr>
               <a:t>هَيَّا نُرَاجِعْ</a:t>
@@ -37954,6 +38074,7 @@
                   <a:srgbClr val="1B3B6F"/>
                 </a:solidFill>
                 <a:latin typeface="Amiri" pitchFamily="2" charset="-78"/>
+                <a:ea typeface="Amiri" pitchFamily="2" charset="-78"/>
                 <a:cs typeface="Amiri" pitchFamily="2" charset="-78"/>
               </a:rPr>
               <a:t>خُطَّةُ التَّقْيِيمِ</a:t>
@@ -38230,6 +38351,7 @@
                   <a:srgbClr val="6B4C9A"/>
                 </a:solidFill>
                 <a:latin typeface="Amiri" pitchFamily="2" charset="-78"/>
+                <a:ea typeface="Amiri" pitchFamily="2" charset="-78"/>
                 <a:cs typeface="Amiri" pitchFamily="2" charset="-78"/>
               </a:rPr>
               <a:t>الجُزْءُ أ</a:t>
@@ -38506,6 +38628,7 @@
                   <a:srgbClr val="2F6FB0"/>
                 </a:solidFill>
                 <a:latin typeface="Amiri" pitchFamily="2" charset="-78"/>
+                <a:ea typeface="Amiri" pitchFamily="2" charset="-78"/>
                 <a:cs typeface="Amiri" pitchFamily="2" charset="-78"/>
               </a:rPr>
               <a:t>الجُزْءُ ب</a:t>
@@ -38782,6 +38905,7 @@
                   <a:srgbClr val="1E6B52"/>
                 </a:solidFill>
                 <a:latin typeface="Amiri" pitchFamily="2" charset="-78"/>
+                <a:ea typeface="Amiri" pitchFamily="2" charset="-78"/>
                 <a:cs typeface="Amiri" pitchFamily="2" charset="-78"/>
               </a:rPr>
               <a:t>القِرَاءَةُ الجَهْرِيَّةُ</a:t>
@@ -39058,6 +39182,7 @@
                   <a:srgbClr val="8A6D1E"/>
                 </a:solidFill>
                 <a:latin typeface="Amiri" pitchFamily="2" charset="-78"/>
+                <a:ea typeface="Amiri" pitchFamily="2" charset="-78"/>
                 <a:cs typeface="Amiri" pitchFamily="2" charset="-78"/>
               </a:rPr>
               <a:t>الهَدَفُ</a:t>
@@ -39334,6 +39459,7 @@
                   <a:srgbClr val="C45A3C"/>
                 </a:solidFill>
                 <a:latin typeface="Amiri" pitchFamily="2" charset="-78"/>
+                <a:ea typeface="Amiri" pitchFamily="2" charset="-78"/>
                 <a:cs typeface="Amiri" pitchFamily="2" charset="-78"/>
               </a:rPr>
               <a:t>اِسْتَعِدَّ</a:t>
@@ -39577,6 +39703,7 @@
                   <a:srgbClr val="D4AF37"/>
                 </a:solidFill>
                 <a:latin typeface="Amiri" pitchFamily="2" charset="-78"/>
+                <a:ea typeface="Amiri" pitchFamily="2" charset="-78"/>
                 <a:cs typeface="Amiri" pitchFamily="2" charset="-78"/>
               </a:rPr>
               <a:t>م</a:t>
@@ -39897,6 +40024,7 @@
                   <a:srgbClr val="8A6D1E"/>
                 </a:solidFill>
                 <a:latin typeface="Amiri" pitchFamily="2" charset="-78"/>
+                <a:ea typeface="Amiri" pitchFamily="2" charset="-78"/>
                 <a:cs typeface="Amiri" pitchFamily="2" charset="-78"/>
               </a:rPr>
               <a:t>اِبْدَأِ الآنَ</a:t>
@@ -40108,6 +40236,7 @@
                   <a:srgbClr val="1B3B6F"/>
                 </a:solidFill>
                 <a:latin typeface="Amiri" pitchFamily="2" charset="-78"/>
+                <a:ea typeface="Amiri" pitchFamily="2" charset="-78"/>
                 <a:cs typeface="Amiri" pitchFamily="2" charset="-78"/>
               </a:rPr>
               <a:t>ج</a:t>
@@ -40209,6 +40338,7 @@
                   <a:srgbClr val="1F2A37"/>
                 </a:solidFill>
                 <a:latin typeface="Amiri" pitchFamily="2" charset="-78"/>
+                <a:ea typeface="Amiri" pitchFamily="2" charset="-78"/>
                 <a:cs typeface="Amiri" pitchFamily="2" charset="-78"/>
               </a:rPr>
               <a:t>حَاءٌ</a:t>
@@ -40310,6 +40440,7 @@
                   <a:srgbClr val="1F2A37"/>
                 </a:solidFill>
                 <a:latin typeface="Amiri" pitchFamily="2" charset="-78"/>
+                <a:ea typeface="Amiri" pitchFamily="2" charset="-78"/>
                 <a:cs typeface="Amiri" pitchFamily="2" charset="-78"/>
               </a:rPr>
               <a:t>جِيمٌ</a:t>
@@ -40411,6 +40542,7 @@
                   <a:srgbClr val="1F2A37"/>
                 </a:solidFill>
                 <a:latin typeface="Amiri" pitchFamily="2" charset="-78"/>
+                <a:ea typeface="Amiri" pitchFamily="2" charset="-78"/>
                 <a:cs typeface="Amiri" pitchFamily="2" charset="-78"/>
               </a:rPr>
               <a:t>خَاءٌ</a:t>
@@ -40584,6 +40716,7 @@
                   <a:srgbClr val="1B3B6F"/>
                 </a:solidFill>
                 <a:latin typeface="Amiri" pitchFamily="2" charset="-78"/>
+                <a:ea typeface="Amiri" pitchFamily="2" charset="-78"/>
                 <a:cs typeface="Amiri" pitchFamily="2" charset="-78"/>
               </a:rPr>
               <a:t>٥</a:t>
@@ -41060,6 +41193,7 @@
                   <a:srgbClr val="1B3B6F"/>
                 </a:solidFill>
                 <a:latin typeface="Amiri" pitchFamily="2" charset="-78"/>
+                <a:ea typeface="Amiri" pitchFamily="2" charset="-78"/>
                 <a:cs typeface="Amiri" pitchFamily="2" charset="-78"/>
               </a:rPr>
               <a:t>ق</a:t>
@@ -41511,6 +41645,7 @@
                   <a:srgbClr val="1B3B6F"/>
                 </a:solidFill>
                 <a:latin typeface="Amiri" pitchFamily="2" charset="-78"/>
+                <a:ea typeface="Amiri" pitchFamily="2" charset="-78"/>
                 <a:cs typeface="Amiri" pitchFamily="2" charset="-78"/>
               </a:rPr>
               <a:t>د</a:t>
@@ -41562,6 +41697,7 @@
                   <a:srgbClr val="1B3B6F"/>
                 </a:solidFill>
                 <a:latin typeface="Amiri" pitchFamily="2" charset="-78"/>
+                <a:ea typeface="Amiri" pitchFamily="2" charset="-78"/>
                 <a:cs typeface="Amiri" pitchFamily="2" charset="-78"/>
               </a:rPr>
               <a:t>د</a:t>
@@ -42000,6 +42136,7 @@
                   <a:srgbClr val="1F2A37"/>
                 </a:solidFill>
                 <a:latin typeface="Amiri" pitchFamily="2" charset="-78"/>
+                <a:ea typeface="Amiri" pitchFamily="2" charset="-78"/>
                 <a:cs typeface="Amiri" pitchFamily="2" charset="-78"/>
               </a:rPr>
               <a:t>إِنْجَازٌ</a:t>
@@ -42101,6 +42238,7 @@
                   <a:srgbClr val="1F2A37"/>
                 </a:solidFill>
                 <a:latin typeface="Amiri" pitchFamily="2" charset="-78"/>
+                <a:ea typeface="Amiri" pitchFamily="2" charset="-78"/>
                 <a:cs typeface="Amiri" pitchFamily="2" charset="-78"/>
               </a:rPr>
               <a:t>مُرَاجَعَةٌ</a:t>
@@ -42202,6 +42340,7 @@
                   <a:srgbClr val="1F2A37"/>
                 </a:solidFill>
                 <a:latin typeface="Amiri" pitchFamily="2" charset="-78"/>
+                <a:ea typeface="Amiri" pitchFamily="2" charset="-78"/>
                 <a:cs typeface="Amiri" pitchFamily="2" charset="-78"/>
               </a:rPr>
               <a:t>تَقْيِيمٌ</a:t>
@@ -42537,6 +42676,7 @@
                   <a:srgbClr val="D4AF37"/>
                 </a:solidFill>
                 <a:latin typeface="Amiri" pitchFamily="2" charset="-78"/>
+                <a:ea typeface="Amiri" pitchFamily="2" charset="-78"/>
                 <a:cs typeface="Amiri" pitchFamily="2" charset="-78"/>
               </a:rPr>
               <a:t>م</a:t>
@@ -42857,6 +42997,7 @@
                   <a:srgbClr val="8A6D1E"/>
                 </a:solidFill>
                 <a:latin typeface="Amiri" pitchFamily="2" charset="-78"/>
+                <a:ea typeface="Amiri" pitchFamily="2" charset="-78"/>
                 <a:cs typeface="Amiri" pitchFamily="2" charset="-78"/>
               </a:rPr>
               <a:t>الإِجَابَاتُ وَالتَّعْلِيلُ</a:t>
@@ -43068,6 +43209,7 @@
                   <a:srgbClr val="1B3B6F"/>
                 </a:solidFill>
                 <a:latin typeface="Amiri" pitchFamily="2" charset="-78"/>
+                <a:ea typeface="Amiri" pitchFamily="2" charset="-78"/>
                 <a:cs typeface="Amiri" pitchFamily="2" charset="-78"/>
               </a:rPr>
               <a:t>ج</a:t>
@@ -43169,6 +43311,7 @@
                   <a:srgbClr val="9AA1AB"/>
                 </a:solidFill>
                 <a:latin typeface="Amiri" pitchFamily="2" charset="-78"/>
+                <a:ea typeface="Amiri" pitchFamily="2" charset="-78"/>
                 <a:cs typeface="Amiri" pitchFamily="2" charset="-78"/>
               </a:rPr>
               <a:t>حَاءٌ</a:t>
@@ -43297,6 +43440,7 @@
                   <a:srgbClr val="1F2A37"/>
                 </a:solidFill>
                 <a:latin typeface="Amiri" pitchFamily="2" charset="-78"/>
+                <a:ea typeface="Amiri" pitchFamily="2" charset="-78"/>
                 <a:cs typeface="Amiri" pitchFamily="2" charset="-78"/>
               </a:rPr>
               <a:t>جِيمٌ</a:t>
@@ -43398,6 +43542,7 @@
                   <a:srgbClr val="9AA1AB"/>
                 </a:solidFill>
                 <a:latin typeface="Amiri" pitchFamily="2" charset="-78"/>
+                <a:ea typeface="Amiri" pitchFamily="2" charset="-78"/>
                 <a:cs typeface="Amiri" pitchFamily="2" charset="-78"/>
               </a:rPr>
               <a:t>خَاءٌ</a:t>
@@ -43609,6 +43754,7 @@
                   <a:srgbClr val="1B3B6F"/>
                 </a:solidFill>
                 <a:latin typeface="Amiri" pitchFamily="2" charset="-78"/>
+                <a:ea typeface="Amiri" pitchFamily="2" charset="-78"/>
                 <a:cs typeface="Amiri" pitchFamily="2" charset="-78"/>
               </a:rPr>
               <a:t>٥</a:t>
@@ -44150,6 +44296,7 @@
                   <a:srgbClr val="1B3B6F"/>
                 </a:solidFill>
                 <a:latin typeface="Amiri" pitchFamily="2" charset="-78"/>
+                <a:ea typeface="Amiri" pitchFamily="2" charset="-78"/>
                 <a:cs typeface="Amiri" pitchFamily="2" charset="-78"/>
               </a:rPr>
               <a:t>ق</a:t>
@@ -44666,6 +44813,7 @@
                   <a:srgbClr val="1B3B6F"/>
                 </a:solidFill>
                 <a:latin typeface="Amiri" pitchFamily="2" charset="-78"/>
+                <a:ea typeface="Amiri" pitchFamily="2" charset="-78"/>
                 <a:cs typeface="Amiri" pitchFamily="2" charset="-78"/>
               </a:rPr>
               <a:t>د</a:t>
@@ -44717,6 +44865,7 @@
                   <a:srgbClr val="1B3B6F"/>
                 </a:solidFill>
                 <a:latin typeface="Amiri" pitchFamily="2" charset="-78"/>
+                <a:ea typeface="Amiri" pitchFamily="2" charset="-78"/>
                 <a:cs typeface="Amiri" pitchFamily="2" charset="-78"/>
               </a:rPr>
               <a:t>د</a:t>
@@ -45247,6 +45396,7 @@
                   <a:srgbClr val="1F2A37"/>
                 </a:solidFill>
                 <a:latin typeface="Amiri" pitchFamily="2" charset="-78"/>
+                <a:ea typeface="Amiri" pitchFamily="2" charset="-78"/>
                 <a:cs typeface="Amiri" pitchFamily="2" charset="-78"/>
               </a:rPr>
               <a:t>إِنْجَازٌ</a:t>
@@ -45348,6 +45498,7 @@
                   <a:srgbClr val="9AA1AB"/>
                 </a:solidFill>
                 <a:latin typeface="Amiri" pitchFamily="2" charset="-78"/>
+                <a:ea typeface="Amiri" pitchFamily="2" charset="-78"/>
                 <a:cs typeface="Amiri" pitchFamily="2" charset="-78"/>
               </a:rPr>
               <a:t>مُرَاجَعَةٌ</a:t>
@@ -45449,6 +45600,7 @@
                   <a:srgbClr val="9AA1AB"/>
                 </a:solidFill>
                 <a:latin typeface="Amiri" pitchFamily="2" charset="-78"/>
+                <a:ea typeface="Amiri" pitchFamily="2" charset="-78"/>
                 <a:cs typeface="Amiri" pitchFamily="2" charset="-78"/>
               </a:rPr>
               <a:t>تَقْيِيمٌ</a:t>
@@ -45635,6 +45787,7 @@
                   <a:srgbClr val="1B3B6F"/>
                 </a:solidFill>
                 <a:latin typeface="Amiri" pitchFamily="2" charset="-78"/>
+                <a:ea typeface="Amiri" pitchFamily="2" charset="-78"/>
                 <a:cs typeface="Amiri" pitchFamily="2" charset="-78"/>
               </a:rPr>
               <a:t>ا ب ت ث … ن ه و ي</a:t>
@@ -45768,6 +45921,7 @@
                   <a:srgbClr val="D4AF37"/>
                 </a:solidFill>
                 <a:latin typeface="Amiri" pitchFamily="2" charset="-78"/>
+                <a:ea typeface="Amiri" pitchFamily="2" charset="-78"/>
                 <a:cs typeface="Amiri" pitchFamily="2" charset="-78"/>
               </a:rPr>
               <a:t>م</a:t>
@@ -46088,6 +46242,7 @@
                   <a:srgbClr val="8A6D1E"/>
                 </a:solidFill>
                 <a:latin typeface="Amiri" pitchFamily="2" charset="-78"/>
+                <a:ea typeface="Amiri" pitchFamily="2" charset="-78"/>
                 <a:cs typeface="Amiri" pitchFamily="2" charset="-78"/>
               </a:rPr>
               <a:t>خُطَّةُ التَّقْيِيمِ</a:t>
@@ -47656,6 +47811,7 @@
                   <a:srgbClr val="D4AF37"/>
                 </a:solidFill>
                 <a:latin typeface="Amiri" pitchFamily="2" charset="-78"/>
+                <a:ea typeface="Amiri" pitchFamily="2" charset="-78"/>
                 <a:cs typeface="Amiri" pitchFamily="2" charset="-78"/>
               </a:rPr>
               <a:t>م</a:t>
@@ -47976,6 +48132,7 @@
                   <a:srgbClr val="8A6D1E"/>
                 </a:solidFill>
                 <a:latin typeface="Amiri" pitchFamily="2" charset="-78"/>
+                <a:ea typeface="Amiri" pitchFamily="2" charset="-78"/>
                 <a:cs typeface="Amiri" pitchFamily="2" charset="-78"/>
               </a:rPr>
               <a:t>اُكْتُبِ الحُرُوفَ</a:t>
@@ -48256,6 +48413,7 @@
                   <a:srgbClr val="1B3B6F"/>
                 </a:solidFill>
                 <a:latin typeface="Amiri" pitchFamily="2" charset="-78"/>
+                <a:ea typeface="Amiri" pitchFamily="2" charset="-78"/>
                 <a:cs typeface="Amiri" pitchFamily="2" charset="-78"/>
               </a:rPr>
               <a:t>ا ب ت ث ج ح خ</a:t>
@@ -48294,6 +48452,7 @@
                   <a:srgbClr val="1B3B6F"/>
                 </a:solidFill>
                 <a:latin typeface="Amiri" pitchFamily="2" charset="-78"/>
+                <a:ea typeface="Amiri" pitchFamily="2" charset="-78"/>
                 <a:cs typeface="Amiri" pitchFamily="2" charset="-78"/>
               </a:rPr>
               <a:t>د ذ ر ز س ش ص</a:t>
@@ -48332,6 +48491,7 @@
                   <a:srgbClr val="1B3B6F"/>
                 </a:solidFill>
                 <a:latin typeface="Amiri" pitchFamily="2" charset="-78"/>
+                <a:ea typeface="Amiri" pitchFamily="2" charset="-78"/>
                 <a:cs typeface="Amiri" pitchFamily="2" charset="-78"/>
               </a:rPr>
               <a:t>ض ط ظ ع غ ف ق</a:t>
@@ -48370,6 +48530,7 @@
                   <a:srgbClr val="1B3B6F"/>
                 </a:solidFill>
                 <a:latin typeface="Amiri" pitchFamily="2" charset="-78"/>
+                <a:ea typeface="Amiri" pitchFamily="2" charset="-78"/>
                 <a:cs typeface="Amiri" pitchFamily="2" charset="-78"/>
               </a:rPr>
               <a:t>ك ل م ن ه و ي</a:t>
@@ -48606,6 +48767,7 @@
                   <a:srgbClr val="D4AF37"/>
                 </a:solidFill>
                 <a:latin typeface="Amiri" pitchFamily="2" charset="-78"/>
+                <a:ea typeface="Amiri" pitchFamily="2" charset="-78"/>
                 <a:cs typeface="Amiri" pitchFamily="2" charset="-78"/>
               </a:rPr>
               <a:t>م</a:t>
@@ -48926,6 +49088,7 @@
                   <a:srgbClr val="8A6D1E"/>
                 </a:solidFill>
                 <a:latin typeface="Amiri" pitchFamily="2" charset="-78"/>
+                <a:ea typeface="Amiri" pitchFamily="2" charset="-78"/>
                 <a:cs typeface="Amiri" pitchFamily="2" charset="-78"/>
               </a:rPr>
               <a:t>أَشْكَالُ الحُرُوفِ</a:t>
@@ -49112,6 +49275,7 @@
                   <a:srgbClr val="1B3B6F"/>
                 </a:solidFill>
                 <a:latin typeface="Amiri" pitchFamily="2" charset="-78"/>
+                <a:ea typeface="Amiri" pitchFamily="2" charset="-78"/>
                 <a:cs typeface="Amiri" pitchFamily="2" charset="-78"/>
               </a:rPr>
               <a:t>ب</a:t>
@@ -49226,6 +49390,7 @@
                   <a:srgbClr val="1F2A37"/>
                 </a:solidFill>
                 <a:latin typeface="Amiri" pitchFamily="2" charset="-78"/>
+                <a:ea typeface="Amiri" pitchFamily="2" charset="-78"/>
                 <a:cs typeface="Amiri" pitchFamily="2" charset="-78"/>
               </a:rPr>
               <a:t>بـ</a:t>
@@ -49327,6 +49492,7 @@
                   <a:srgbClr val="1F2A37"/>
                 </a:solidFill>
                 <a:latin typeface="Amiri" pitchFamily="2" charset="-78"/>
+                <a:ea typeface="Amiri" pitchFamily="2" charset="-78"/>
                 <a:cs typeface="Amiri" pitchFamily="2" charset="-78"/>
               </a:rPr>
               <a:t>ـبـ</a:t>
@@ -49428,6 +49594,7 @@
                   <a:srgbClr val="1F2A37"/>
                 </a:solidFill>
                 <a:latin typeface="Amiri" pitchFamily="2" charset="-78"/>
+                <a:ea typeface="Amiri" pitchFamily="2" charset="-78"/>
                 <a:cs typeface="Amiri" pitchFamily="2" charset="-78"/>
               </a:rPr>
               <a:t>ـب</a:t>
@@ -49576,6 +49743,7 @@
                   <a:srgbClr val="1B3B6F"/>
                 </a:solidFill>
                 <a:latin typeface="Amiri" pitchFamily="2" charset="-78"/>
+                <a:ea typeface="Amiri" pitchFamily="2" charset="-78"/>
                 <a:cs typeface="Amiri" pitchFamily="2" charset="-78"/>
               </a:rPr>
               <a:t>ع</a:t>
@@ -49690,6 +49858,7 @@
                   <a:srgbClr val="1F2A37"/>
                 </a:solidFill>
                 <a:latin typeface="Amiri" pitchFamily="2" charset="-78"/>
+                <a:ea typeface="Amiri" pitchFamily="2" charset="-78"/>
                 <a:cs typeface="Amiri" pitchFamily="2" charset="-78"/>
               </a:rPr>
               <a:t>عـ</a:t>
@@ -49791,6 +49960,7 @@
                   <a:srgbClr val="1F2A37"/>
                 </a:solidFill>
                 <a:latin typeface="Amiri" pitchFamily="2" charset="-78"/>
+                <a:ea typeface="Amiri" pitchFamily="2" charset="-78"/>
                 <a:cs typeface="Amiri" pitchFamily="2" charset="-78"/>
               </a:rPr>
               <a:t>ـع</a:t>
@@ -49892,6 +50062,7 @@
                   <a:srgbClr val="1F2A37"/>
                 </a:solidFill>
                 <a:latin typeface="Amiri" pitchFamily="2" charset="-78"/>
+                <a:ea typeface="Amiri" pitchFamily="2" charset="-78"/>
                 <a:cs typeface="Amiri" pitchFamily="2" charset="-78"/>
               </a:rPr>
               <a:t>ـعـ</a:t>
@@ -50040,6 +50211,7 @@
                   <a:srgbClr val="1B3B6F"/>
                 </a:solidFill>
                 <a:latin typeface="Amiri" pitchFamily="2" charset="-78"/>
+                <a:ea typeface="Amiri" pitchFamily="2" charset="-78"/>
                 <a:cs typeface="Amiri" pitchFamily="2" charset="-78"/>
               </a:rPr>
               <a:t>ف</a:t>
@@ -50154,6 +50326,7 @@
                   <a:srgbClr val="1F2A37"/>
                 </a:solidFill>
                 <a:latin typeface="Amiri" pitchFamily="2" charset="-78"/>
+                <a:ea typeface="Amiri" pitchFamily="2" charset="-78"/>
                 <a:cs typeface="Amiri" pitchFamily="2" charset="-78"/>
               </a:rPr>
               <a:t>فـ</a:t>
@@ -50255,6 +50428,7 @@
                   <a:srgbClr val="1F2A37"/>
                 </a:solidFill>
                 <a:latin typeface="Amiri" pitchFamily="2" charset="-78"/>
+                <a:ea typeface="Amiri" pitchFamily="2" charset="-78"/>
                 <a:cs typeface="Amiri" pitchFamily="2" charset="-78"/>
               </a:rPr>
               <a:t>ـف</a:t>
@@ -50356,6 +50530,7 @@
                   <a:srgbClr val="1F2A37"/>
                 </a:solidFill>
                 <a:latin typeface="Amiri" pitchFamily="2" charset="-78"/>
+                <a:ea typeface="Amiri" pitchFamily="2" charset="-78"/>
                 <a:cs typeface="Amiri" pitchFamily="2" charset="-78"/>
               </a:rPr>
               <a:t>ـفـ</a:t>
@@ -50504,6 +50679,7 @@
                   <a:srgbClr val="1B3B6F"/>
                 </a:solidFill>
                 <a:latin typeface="Amiri" pitchFamily="2" charset="-78"/>
+                <a:ea typeface="Amiri" pitchFamily="2" charset="-78"/>
                 <a:cs typeface="Amiri" pitchFamily="2" charset="-78"/>
               </a:rPr>
               <a:t>ك</a:t>
@@ -50618,6 +50794,7 @@
                   <a:srgbClr val="1F2A37"/>
                 </a:solidFill>
                 <a:latin typeface="Amiri" pitchFamily="2" charset="-78"/>
+                <a:ea typeface="Amiri" pitchFamily="2" charset="-78"/>
                 <a:cs typeface="Amiri" pitchFamily="2" charset="-78"/>
               </a:rPr>
               <a:t>ـك</a:t>
@@ -50719,6 +50896,7 @@
                   <a:srgbClr val="1F2A37"/>
                 </a:solidFill>
                 <a:latin typeface="Amiri" pitchFamily="2" charset="-78"/>
+                <a:ea typeface="Amiri" pitchFamily="2" charset="-78"/>
                 <a:cs typeface="Amiri" pitchFamily="2" charset="-78"/>
               </a:rPr>
               <a:t>كـ</a:t>
@@ -50820,6 +50998,7 @@
                   <a:srgbClr val="1F2A37"/>
                 </a:solidFill>
                 <a:latin typeface="Amiri" pitchFamily="2" charset="-78"/>
+                <a:ea typeface="Amiri" pitchFamily="2" charset="-78"/>
                 <a:cs typeface="Amiri" pitchFamily="2" charset="-78"/>
               </a:rPr>
               <a:t>ـكـ</a:t>
@@ -50968,6 +51147,7 @@
                   <a:srgbClr val="1B3B6F"/>
                 </a:solidFill>
                 <a:latin typeface="Amiri" pitchFamily="2" charset="-78"/>
+                <a:ea typeface="Amiri" pitchFamily="2" charset="-78"/>
                 <a:cs typeface="Amiri" pitchFamily="2" charset="-78"/>
               </a:rPr>
               <a:t>م</a:t>
@@ -51082,6 +51262,7 @@
                   <a:srgbClr val="1F2A37"/>
                 </a:solidFill>
                 <a:latin typeface="Amiri" pitchFamily="2" charset="-78"/>
+                <a:ea typeface="Amiri" pitchFamily="2" charset="-78"/>
                 <a:cs typeface="Amiri" pitchFamily="2" charset="-78"/>
               </a:rPr>
               <a:t>مـ</a:t>
@@ -51183,6 +51364,7 @@
                   <a:srgbClr val="1F2A37"/>
                 </a:solidFill>
                 <a:latin typeface="Amiri" pitchFamily="2" charset="-78"/>
+                <a:ea typeface="Amiri" pitchFamily="2" charset="-78"/>
                 <a:cs typeface="Amiri" pitchFamily="2" charset="-78"/>
               </a:rPr>
               <a:t>ـم</a:t>
@@ -51284,6 +51466,7 @@
                   <a:srgbClr val="1F2A37"/>
                 </a:solidFill>
                 <a:latin typeface="Amiri" pitchFamily="2" charset="-78"/>
+                <a:ea typeface="Amiri" pitchFamily="2" charset="-78"/>
                 <a:cs typeface="Amiri" pitchFamily="2" charset="-78"/>
               </a:rPr>
               <a:t>ـمـ</a:t>
@@ -51432,6 +51615,7 @@
                   <a:srgbClr val="1B3B6F"/>
                 </a:solidFill>
                 <a:latin typeface="Amiri" pitchFamily="2" charset="-78"/>
+                <a:ea typeface="Amiri" pitchFamily="2" charset="-78"/>
                 <a:cs typeface="Amiri" pitchFamily="2" charset="-78"/>
               </a:rPr>
               <a:t>ي</a:t>
@@ -51546,6 +51730,7 @@
                   <a:srgbClr val="1F2A37"/>
                 </a:solidFill>
                 <a:latin typeface="Amiri" pitchFamily="2" charset="-78"/>
+                <a:ea typeface="Amiri" pitchFamily="2" charset="-78"/>
                 <a:cs typeface="Amiri" pitchFamily="2" charset="-78"/>
               </a:rPr>
               <a:t>ـي</a:t>
@@ -51647,6 +51832,7 @@
                   <a:srgbClr val="1F2A37"/>
                 </a:solidFill>
                 <a:latin typeface="Amiri" pitchFamily="2" charset="-78"/>
+                <a:ea typeface="Amiri" pitchFamily="2" charset="-78"/>
                 <a:cs typeface="Amiri" pitchFamily="2" charset="-78"/>
               </a:rPr>
               <a:t>يـ</a:t>
@@ -51748,6 +51934,7 @@
                   <a:srgbClr val="1F2A37"/>
                 </a:solidFill>
                 <a:latin typeface="Amiri" pitchFamily="2" charset="-78"/>
+                <a:ea typeface="Amiri" pitchFamily="2" charset="-78"/>
                 <a:cs typeface="Amiri" pitchFamily="2" charset="-78"/>
               </a:rPr>
               <a:t>ـيـ</a:t>
@@ -51881,6 +52068,7 @@
                   <a:srgbClr val="D4AF37"/>
                 </a:solidFill>
                 <a:latin typeface="Amiri" pitchFamily="2" charset="-78"/>
+                <a:ea typeface="Amiri" pitchFamily="2" charset="-78"/>
                 <a:cs typeface="Amiri" pitchFamily="2" charset="-78"/>
               </a:rPr>
               <a:t>م</a:t>
@@ -52201,6 +52389,7 @@
                   <a:srgbClr val="8A6D1E"/>
                 </a:solidFill>
                 <a:latin typeface="Amiri" pitchFamily="2" charset="-78"/>
+                <a:ea typeface="Amiri" pitchFamily="2" charset="-78"/>
                 <a:cs typeface="Amiri" pitchFamily="2" charset="-78"/>
               </a:rPr>
               <a:t>الإِجَابَاتُ</a:t>
@@ -52387,6 +52576,7 @@
                   <a:srgbClr val="1B3B6F"/>
                 </a:solidFill>
                 <a:latin typeface="Amiri" pitchFamily="2" charset="-78"/>
+                <a:ea typeface="Amiri" pitchFamily="2" charset="-78"/>
                 <a:cs typeface="Amiri" pitchFamily="2" charset="-78"/>
               </a:rPr>
               <a:t>ب</a:t>
@@ -52528,6 +52718,7 @@
                   <a:srgbClr val="1F2A37"/>
                 </a:solidFill>
                 <a:latin typeface="Amiri" pitchFamily="2" charset="-78"/>
+                <a:ea typeface="Amiri" pitchFamily="2" charset="-78"/>
                 <a:cs typeface="Amiri" pitchFamily="2" charset="-78"/>
               </a:rPr>
               <a:t>بـ</a:t>
@@ -52629,6 +52820,7 @@
                   <a:srgbClr val="9AA1AB"/>
                 </a:solidFill>
                 <a:latin typeface="Amiri" pitchFamily="2" charset="-78"/>
+                <a:ea typeface="Amiri" pitchFamily="2" charset="-78"/>
                 <a:cs typeface="Amiri" pitchFamily="2" charset="-78"/>
               </a:rPr>
               <a:t>ـبـ</a:t>
@@ -52730,6 +52922,7 @@
                   <a:srgbClr val="9AA1AB"/>
                 </a:solidFill>
                 <a:latin typeface="Amiri" pitchFamily="2" charset="-78"/>
+                <a:ea typeface="Amiri" pitchFamily="2" charset="-78"/>
                 <a:cs typeface="Amiri" pitchFamily="2" charset="-78"/>
               </a:rPr>
               <a:t>ـب</a:t>
@@ -52916,6 +53109,7 @@
                   <a:srgbClr val="1B3B6F"/>
                 </a:solidFill>
                 <a:latin typeface="Amiri" pitchFamily="2" charset="-78"/>
+                <a:ea typeface="Amiri" pitchFamily="2" charset="-78"/>
                 <a:cs typeface="Amiri" pitchFamily="2" charset="-78"/>
               </a:rPr>
               <a:t>ع</a:t>
@@ -53030,6 +53224,7 @@
                   <a:srgbClr val="9AA1AB"/>
                 </a:solidFill>
                 <a:latin typeface="Amiri" pitchFamily="2" charset="-78"/>
+                <a:ea typeface="Amiri" pitchFamily="2" charset="-78"/>
                 <a:cs typeface="Amiri" pitchFamily="2" charset="-78"/>
               </a:rPr>
               <a:t>عـ</a:t>
@@ -53131,6 +53326,7 @@
                   <a:srgbClr val="9AA1AB"/>
                 </a:solidFill>
                 <a:latin typeface="Amiri" pitchFamily="2" charset="-78"/>
+                <a:ea typeface="Amiri" pitchFamily="2" charset="-78"/>
                 <a:cs typeface="Amiri" pitchFamily="2" charset="-78"/>
               </a:rPr>
               <a:t>ـع</a:t>
@@ -53259,6 +53455,7 @@
                   <a:srgbClr val="1F2A37"/>
                 </a:solidFill>
                 <a:latin typeface="Amiri" pitchFamily="2" charset="-78"/>
+                <a:ea typeface="Amiri" pitchFamily="2" charset="-78"/>
                 <a:cs typeface="Amiri" pitchFamily="2" charset="-78"/>
               </a:rPr>
               <a:t>ـعـ</a:t>
@@ -53445,6 +53642,7 @@
                   <a:srgbClr val="1B3B6F"/>
                 </a:solidFill>
                 <a:latin typeface="Amiri" pitchFamily="2" charset="-78"/>
+                <a:ea typeface="Amiri" pitchFamily="2" charset="-78"/>
                 <a:cs typeface="Amiri" pitchFamily="2" charset="-78"/>
               </a:rPr>
               <a:t>ف</a:t>
@@ -53559,6 +53757,7 @@
                   <a:srgbClr val="9AA1AB"/>
                 </a:solidFill>
                 <a:latin typeface="Amiri" pitchFamily="2" charset="-78"/>
+                <a:ea typeface="Amiri" pitchFamily="2" charset="-78"/>
                 <a:cs typeface="Amiri" pitchFamily="2" charset="-78"/>
               </a:rPr>
               <a:t>فـ</a:t>
@@ -53687,6 +53886,7 @@
                   <a:srgbClr val="1F2A37"/>
                 </a:solidFill>
                 <a:latin typeface="Amiri" pitchFamily="2" charset="-78"/>
+                <a:ea typeface="Amiri" pitchFamily="2" charset="-78"/>
                 <a:cs typeface="Amiri" pitchFamily="2" charset="-78"/>
               </a:rPr>
               <a:t>ـف</a:t>
@@ -53788,6 +53988,7 @@
                   <a:srgbClr val="9AA1AB"/>
                 </a:solidFill>
                 <a:latin typeface="Amiri" pitchFamily="2" charset="-78"/>
+                <a:ea typeface="Amiri" pitchFamily="2" charset="-78"/>
                 <a:cs typeface="Amiri" pitchFamily="2" charset="-78"/>
               </a:rPr>
               <a:t>ـفـ</a:t>
@@ -53974,6 +54175,7 @@
                   <a:srgbClr val="1B3B6F"/>
                 </a:solidFill>
                 <a:latin typeface="Amiri" pitchFamily="2" charset="-78"/>
+                <a:ea typeface="Amiri" pitchFamily="2" charset="-78"/>
                 <a:cs typeface="Amiri" pitchFamily="2" charset="-78"/>
               </a:rPr>
               <a:t>ك</a:t>
@@ -54088,6 +54290,7 @@
                   <a:srgbClr val="9AA1AB"/>
                 </a:solidFill>
                 <a:latin typeface="Amiri" pitchFamily="2" charset="-78"/>
+                <a:ea typeface="Amiri" pitchFamily="2" charset="-78"/>
                 <a:cs typeface="Amiri" pitchFamily="2" charset="-78"/>
               </a:rPr>
               <a:t>ـك</a:t>
@@ -54216,6 +54419,7 @@
                   <a:srgbClr val="1F2A37"/>
                 </a:solidFill>
                 <a:latin typeface="Amiri" pitchFamily="2" charset="-78"/>
+                <a:ea typeface="Amiri" pitchFamily="2" charset="-78"/>
                 <a:cs typeface="Amiri" pitchFamily="2" charset="-78"/>
               </a:rPr>
               <a:t>كـ</a:t>
@@ -54317,6 +54521,7 @@
                   <a:srgbClr val="9AA1AB"/>
                 </a:solidFill>
                 <a:latin typeface="Amiri" pitchFamily="2" charset="-78"/>
+                <a:ea typeface="Amiri" pitchFamily="2" charset="-78"/>
                 <a:cs typeface="Amiri" pitchFamily="2" charset="-78"/>
               </a:rPr>
               <a:t>ـكـ</a:t>
@@ -54503,6 +54708,7 @@
                   <a:srgbClr val="1B3B6F"/>
                 </a:solidFill>
                 <a:latin typeface="Amiri" pitchFamily="2" charset="-78"/>
+                <a:ea typeface="Amiri" pitchFamily="2" charset="-78"/>
                 <a:cs typeface="Amiri" pitchFamily="2" charset="-78"/>
               </a:rPr>
               <a:t>م</a:t>
@@ -54617,6 +54823,7 @@
                   <a:srgbClr val="9AA1AB"/>
                 </a:solidFill>
                 <a:latin typeface="Amiri" pitchFamily="2" charset="-78"/>
+                <a:ea typeface="Amiri" pitchFamily="2" charset="-78"/>
                 <a:cs typeface="Amiri" pitchFamily="2" charset="-78"/>
               </a:rPr>
               <a:t>مـ</a:t>
@@ -54718,6 +54925,7 @@
                   <a:srgbClr val="9AA1AB"/>
                 </a:solidFill>
                 <a:latin typeface="Amiri" pitchFamily="2" charset="-78"/>
+                <a:ea typeface="Amiri" pitchFamily="2" charset="-78"/>
                 <a:cs typeface="Amiri" pitchFamily="2" charset="-78"/>
               </a:rPr>
               <a:t>ـم</a:t>
@@ -54846,6 +55054,7 @@
                   <a:srgbClr val="1F2A37"/>
                 </a:solidFill>
                 <a:latin typeface="Amiri" pitchFamily="2" charset="-78"/>
+                <a:ea typeface="Amiri" pitchFamily="2" charset="-78"/>
                 <a:cs typeface="Amiri" pitchFamily="2" charset="-78"/>
               </a:rPr>
               <a:t>ـمـ</a:t>
@@ -55032,6 +55241,7 @@
                   <a:srgbClr val="1B3B6F"/>
                 </a:solidFill>
                 <a:latin typeface="Amiri" pitchFamily="2" charset="-78"/>
+                <a:ea typeface="Amiri" pitchFamily="2" charset="-78"/>
                 <a:cs typeface="Amiri" pitchFamily="2" charset="-78"/>
               </a:rPr>
               <a:t>ي</a:t>
@@ -55173,6 +55383,7 @@
                   <a:srgbClr val="1F2A37"/>
                 </a:solidFill>
                 <a:latin typeface="Amiri" pitchFamily="2" charset="-78"/>
+                <a:ea typeface="Amiri" pitchFamily="2" charset="-78"/>
                 <a:cs typeface="Amiri" pitchFamily="2" charset="-78"/>
               </a:rPr>
               <a:t>ـي</a:t>
@@ -55274,6 +55485,7 @@
                   <a:srgbClr val="9AA1AB"/>
                 </a:solidFill>
                 <a:latin typeface="Amiri" pitchFamily="2" charset="-78"/>
+                <a:ea typeface="Amiri" pitchFamily="2" charset="-78"/>
                 <a:cs typeface="Amiri" pitchFamily="2" charset="-78"/>
               </a:rPr>
               <a:t>يـ</a:t>
@@ -55375,6 +55587,7 @@
                   <a:srgbClr val="9AA1AB"/>
                 </a:solidFill>
                 <a:latin typeface="Amiri" pitchFamily="2" charset="-78"/>
+                <a:ea typeface="Amiri" pitchFamily="2" charset="-78"/>
                 <a:cs typeface="Amiri" pitchFamily="2" charset="-78"/>
               </a:rPr>
               <a:t>ـيـ</a:t>
@@ -55511,13 +55724,9 @@
     <a:fontScheme name="Office">
       <a:majorFont>
         <a:latin typeface="Calibri Light" panose="020F0302020204030204"/>
-        <a:ea typeface=""/>
-        <a:cs typeface=""/>
-        <a:font script="Jpan" typeface="游ゴシック Light"/>
-        <a:font script="Hang" typeface="맑은 고딕"/>
-        <a:font script="Hans" typeface="等线 Light"/>
-        <a:font script="Hant" typeface="新細明體"/>
-        <a:font script="Arab" typeface="Times New Roman"/>
+        <a:ea typeface="Amiri" pitchFamily="2" charset="-78"/>
+        <a:cs typeface="Amiri" pitchFamily="2" charset="-78"/>
+        <a:font script="Arab" typeface="Amiri"/>
         <a:font script="Hebr" typeface="Times New Roman"/>
         <a:font script="Thai" typeface="Angsana New"/>
         <a:font script="Ethi" typeface="Nyala"/>
@@ -55563,13 +55772,9 @@
       </a:majorFont>
       <a:minorFont>
         <a:latin typeface="Calibri" panose="020F0502020204030204"/>
-        <a:ea typeface=""/>
-        <a:cs typeface=""/>
-        <a:font script="Jpan" typeface="游ゴシック"/>
-        <a:font script="Hang" typeface="맑은 고딕"/>
-        <a:font script="Hans" typeface="等线"/>
-        <a:font script="Hant" typeface="新細明體"/>
-        <a:font script="Arab" typeface="Arial"/>
+        <a:ea typeface="Amiri" pitchFamily="2" charset="-78"/>
+        <a:cs typeface="Amiri" pitchFamily="2" charset="-78"/>
+        <a:font script="Arab" typeface="Amiri"/>
         <a:font script="Hebr" typeface="Arial"/>
         <a:font script="Thai" typeface="Cordia New"/>
         <a:font script="Ethi" typeface="Nyala"/>
